--- a/playstore/그래픽 이미지.pptx
+++ b/playstore/그래픽 이미지.pptx
@@ -243,7 +243,7 @@
           <a:p>
             <a:fld id="{E9E11FEF-B33F-4CA6-B930-AB184EA6FE76}" type="datetimeFigureOut">
               <a:rPr lang="ko-KR" altLang="en-US" smtClean="0"/>
-              <a:t>2026. 3. 18.</a:t>
+              <a:t>2026. 3. 20.</a:t>
             </a:fld>
             <a:endParaRPr lang="ko-KR" altLang="en-US"/>
           </a:p>
@@ -413,7 +413,7 @@
           <a:p>
             <a:fld id="{E9E11FEF-B33F-4CA6-B930-AB184EA6FE76}" type="datetimeFigureOut">
               <a:rPr lang="ko-KR" altLang="en-US" smtClean="0"/>
-              <a:t>2026. 3. 18.</a:t>
+              <a:t>2026. 3. 20.</a:t>
             </a:fld>
             <a:endParaRPr lang="ko-KR" altLang="en-US"/>
           </a:p>
@@ -593,7 +593,7 @@
           <a:p>
             <a:fld id="{E9E11FEF-B33F-4CA6-B930-AB184EA6FE76}" type="datetimeFigureOut">
               <a:rPr lang="ko-KR" altLang="en-US" smtClean="0"/>
-              <a:t>2026. 3. 18.</a:t>
+              <a:t>2026. 3. 20.</a:t>
             </a:fld>
             <a:endParaRPr lang="ko-KR" altLang="en-US"/>
           </a:p>
@@ -763,7 +763,7 @@
           <a:p>
             <a:fld id="{E9E11FEF-B33F-4CA6-B930-AB184EA6FE76}" type="datetimeFigureOut">
               <a:rPr lang="ko-KR" altLang="en-US" smtClean="0"/>
-              <a:t>2026. 3. 18.</a:t>
+              <a:t>2026. 3. 20.</a:t>
             </a:fld>
             <a:endParaRPr lang="ko-KR" altLang="en-US"/>
           </a:p>
@@ -1009,7 +1009,7 @@
           <a:p>
             <a:fld id="{E9E11FEF-B33F-4CA6-B930-AB184EA6FE76}" type="datetimeFigureOut">
               <a:rPr lang="ko-KR" altLang="en-US" smtClean="0"/>
-              <a:t>2026. 3. 18.</a:t>
+              <a:t>2026. 3. 20.</a:t>
             </a:fld>
             <a:endParaRPr lang="ko-KR" altLang="en-US"/>
           </a:p>
@@ -1241,7 +1241,7 @@
           <a:p>
             <a:fld id="{E9E11FEF-B33F-4CA6-B930-AB184EA6FE76}" type="datetimeFigureOut">
               <a:rPr lang="ko-KR" altLang="en-US" smtClean="0"/>
-              <a:t>2026. 3. 18.</a:t>
+              <a:t>2026. 3. 20.</a:t>
             </a:fld>
             <a:endParaRPr lang="ko-KR" altLang="en-US"/>
           </a:p>
@@ -1608,7 +1608,7 @@
           <a:p>
             <a:fld id="{E9E11FEF-B33F-4CA6-B930-AB184EA6FE76}" type="datetimeFigureOut">
               <a:rPr lang="ko-KR" altLang="en-US" smtClean="0"/>
-              <a:t>2026. 3. 18.</a:t>
+              <a:t>2026. 3. 20.</a:t>
             </a:fld>
             <a:endParaRPr lang="ko-KR" altLang="en-US"/>
           </a:p>
@@ -1726,7 +1726,7 @@
           <a:p>
             <a:fld id="{E9E11FEF-B33F-4CA6-B930-AB184EA6FE76}" type="datetimeFigureOut">
               <a:rPr lang="ko-KR" altLang="en-US" smtClean="0"/>
-              <a:t>2026. 3. 18.</a:t>
+              <a:t>2026. 3. 20.</a:t>
             </a:fld>
             <a:endParaRPr lang="ko-KR" altLang="en-US"/>
           </a:p>
@@ -1821,7 +1821,7 @@
           <a:p>
             <a:fld id="{E9E11FEF-B33F-4CA6-B930-AB184EA6FE76}" type="datetimeFigureOut">
               <a:rPr lang="ko-KR" altLang="en-US" smtClean="0"/>
-              <a:t>2026. 3. 18.</a:t>
+              <a:t>2026. 3. 20.</a:t>
             </a:fld>
             <a:endParaRPr lang="ko-KR" altLang="en-US"/>
           </a:p>
@@ -2098,7 +2098,7 @@
           <a:p>
             <a:fld id="{E9E11FEF-B33F-4CA6-B930-AB184EA6FE76}" type="datetimeFigureOut">
               <a:rPr lang="ko-KR" altLang="en-US" smtClean="0"/>
-              <a:t>2026. 3. 18.</a:t>
+              <a:t>2026. 3. 20.</a:t>
             </a:fld>
             <a:endParaRPr lang="ko-KR" altLang="en-US"/>
           </a:p>
@@ -2355,7 +2355,7 @@
           <a:p>
             <a:fld id="{E9E11FEF-B33F-4CA6-B930-AB184EA6FE76}" type="datetimeFigureOut">
               <a:rPr lang="ko-KR" altLang="en-US" smtClean="0"/>
-              <a:t>2026. 3. 18.</a:t>
+              <a:t>2026. 3. 20.</a:t>
             </a:fld>
             <a:endParaRPr lang="ko-KR" altLang="en-US"/>
           </a:p>
@@ -2568,7 +2568,7 @@
           <a:p>
             <a:fld id="{E9E11FEF-B33F-4CA6-B930-AB184EA6FE76}" type="datetimeFigureOut">
               <a:rPr lang="ko-KR" altLang="en-US" smtClean="0"/>
-              <a:t>2026. 3. 18.</a:t>
+              <a:t>2026. 3. 20.</a:t>
             </a:fld>
             <a:endParaRPr lang="ko-KR" altLang="en-US"/>
           </a:p>
@@ -3067,8 +3067,8 @@
                 <a:solidFill>
                   <a:schemeClr val="bg1"/>
                 </a:solidFill>
-                <a:latin typeface="HY헤드라인M" panose="02030600000101010101" pitchFamily="18" charset="-127"/>
-                <a:ea typeface="HY헤드라인M" panose="02030600000101010101" pitchFamily="18" charset="-127"/>
+                <a:latin typeface="BM DoHyeon OTF" panose="020B0600000101010101" pitchFamily="34" charset="-127"/>
+                <a:ea typeface="BM DoHyeon OTF" panose="020B0600000101010101" pitchFamily="34" charset="-127"/>
               </a:rPr>
               <a:t>텃밭일기</a:t>
             </a:r>
@@ -3076,8 +3076,8 @@
               <a:solidFill>
                 <a:schemeClr val="bg1"/>
               </a:solidFill>
-              <a:latin typeface="HY헤드라인M" panose="02030600000101010101" pitchFamily="18" charset="-127"/>
-              <a:ea typeface="HY헤드라인M" panose="02030600000101010101" pitchFamily="18" charset="-127"/>
+              <a:latin typeface="BM DoHyeon OTF" panose="020B0600000101010101" pitchFamily="34" charset="-127"/>
+              <a:ea typeface="BM DoHyeon OTF" panose="020B0600000101010101" pitchFamily="34" charset="-127"/>
             </a:endParaRPr>
           </a:p>
         </p:txBody>
